--- a/hotspot_modis.pptx
+++ b/hotspot_modis.pptx
@@ -221,7 +221,7 @@
           <a:p>
             <a:fld id="{E942096B-04F5-475D-A996-EA022195660B}" type="datetimeFigureOut">
               <a:rPr lang="en-US" smtClean="0"/>
-              <a:t>9/11/2026</a:t>
+              <a:t>9/14/2026</a:t>
             </a:fld>
             <a:endParaRPr lang="en-US"/>
           </a:p>
@@ -835,7 +835,7 @@
           <a:p>
             <a:fld id="{5BCAD085-E8A6-8845-BD4E-CB4CCA059FC4}" type="datetimeFigureOut">
               <a:rPr lang="en-US" smtClean="0"/>
-              <a:t>9/11/2026</a:t>
+              <a:t>9/14/2026</a:t>
             </a:fld>
             <a:endParaRPr lang="en-US"/>
           </a:p>
@@ -1003,7 +1003,7 @@
           <a:p>
             <a:fld id="{5BCAD085-E8A6-8845-BD4E-CB4CCA059FC4}" type="datetimeFigureOut">
               <a:rPr lang="en-US" smtClean="0"/>
-              <a:t>9/11/2026</a:t>
+              <a:t>9/14/2026</a:t>
             </a:fld>
             <a:endParaRPr lang="en-US"/>
           </a:p>
@@ -1181,7 +1181,7 @@
           <a:p>
             <a:fld id="{5BCAD085-E8A6-8845-BD4E-CB4CCA059FC4}" type="datetimeFigureOut">
               <a:rPr lang="en-US" smtClean="0"/>
-              <a:t>9/11/2026</a:t>
+              <a:t>9/14/2026</a:t>
             </a:fld>
             <a:endParaRPr lang="en-US"/>
           </a:p>
@@ -1349,7 +1349,7 @@
           <a:p>
             <a:fld id="{5BCAD085-E8A6-8845-BD4E-CB4CCA059FC4}" type="datetimeFigureOut">
               <a:rPr lang="en-US" smtClean="0"/>
-              <a:t>9/11/2026</a:t>
+              <a:t>9/14/2026</a:t>
             </a:fld>
             <a:endParaRPr lang="en-US"/>
           </a:p>
@@ -1594,7 +1594,7 @@
           <a:p>
             <a:fld id="{5BCAD085-E8A6-8845-BD4E-CB4CCA059FC4}" type="datetimeFigureOut">
               <a:rPr lang="en-US" smtClean="0"/>
-              <a:t>9/11/2026</a:t>
+              <a:t>9/14/2026</a:t>
             </a:fld>
             <a:endParaRPr lang="en-US"/>
           </a:p>
@@ -1879,7 +1879,7 @@
           <a:p>
             <a:fld id="{5BCAD085-E8A6-8845-BD4E-CB4CCA059FC4}" type="datetimeFigureOut">
               <a:rPr lang="en-US" smtClean="0"/>
-              <a:t>9/11/2026</a:t>
+              <a:t>9/14/2026</a:t>
             </a:fld>
             <a:endParaRPr lang="en-US"/>
           </a:p>
@@ -2298,7 +2298,7 @@
           <a:p>
             <a:fld id="{5BCAD085-E8A6-8845-BD4E-CB4CCA059FC4}" type="datetimeFigureOut">
               <a:rPr lang="en-US" smtClean="0"/>
-              <a:t>9/11/2026</a:t>
+              <a:t>9/14/2026</a:t>
             </a:fld>
             <a:endParaRPr lang="en-US"/>
           </a:p>
@@ -2415,7 +2415,7 @@
           <a:p>
             <a:fld id="{5BCAD085-E8A6-8845-BD4E-CB4CCA059FC4}" type="datetimeFigureOut">
               <a:rPr lang="en-US" smtClean="0"/>
-              <a:t>9/11/2026</a:t>
+              <a:t>9/14/2026</a:t>
             </a:fld>
             <a:endParaRPr lang="en-US"/>
           </a:p>
@@ -2510,7 +2510,7 @@
           <a:p>
             <a:fld id="{5BCAD085-E8A6-8845-BD4E-CB4CCA059FC4}" type="datetimeFigureOut">
               <a:rPr lang="en-US" smtClean="0"/>
-              <a:t>9/11/2026</a:t>
+              <a:t>9/14/2026</a:t>
             </a:fld>
             <a:endParaRPr lang="en-US"/>
           </a:p>
@@ -2785,7 +2785,7 @@
           <a:p>
             <a:fld id="{5BCAD085-E8A6-8845-BD4E-CB4CCA059FC4}" type="datetimeFigureOut">
               <a:rPr lang="en-US" smtClean="0"/>
-              <a:t>9/11/2026</a:t>
+              <a:t>9/14/2026</a:t>
             </a:fld>
             <a:endParaRPr lang="en-US"/>
           </a:p>
@@ -3037,7 +3037,7 @@
           <a:p>
             <a:fld id="{5BCAD085-E8A6-8845-BD4E-CB4CCA059FC4}" type="datetimeFigureOut">
               <a:rPr lang="en-US" smtClean="0"/>
-              <a:t>9/11/2026</a:t>
+              <a:t>9/14/2026</a:t>
             </a:fld>
             <a:endParaRPr lang="en-US"/>
           </a:p>
@@ -3248,7 +3248,7 @@
           <a:p>
             <a:fld id="{5BCAD085-E8A6-8845-BD4E-CB4CCA059FC4}" type="datetimeFigureOut">
               <a:rPr lang="en-US" smtClean="0"/>
-              <a:t>9/11/2026</a:t>
+              <a:t>9/14/2026</a:t>
             </a:fld>
             <a:endParaRPr lang="en-US"/>
           </a:p>
@@ -4114,13 +4114,13 @@
   <p:clrMapOvr>
     <a:masterClrMapping/>
   </p:clrMapOvr>
-  <mc:AlternateContent xmlns:mc="http://schemas.openxmlformats.org/markup-compatibility/2006">
-    <mc:Choice xmlns:p14="http://schemas.microsoft.com/office/powerpoint/2010/main" Requires="p14">
+  <mc:AlternateContent xmlns:mc="http://schemas.openxmlformats.org/markup-compatibility/2006" xmlns:p14="http://schemas.microsoft.com/office/powerpoint/2010/main">
+    <mc:Choice Requires="p14">
       <p:transition spd="slow" p14:dur="1500">
         <p:split orient="vert"/>
       </p:transition>
     </mc:Choice>
-    <mc:Fallback>
+    <mc:Fallback xmlns="">
       <p:transition spd="slow">
         <p:split orient="vert"/>
       </p:transition>
@@ -13681,7 +13681,7 @@
         <p:spPr>
           <a:xfrm>
             <a:off x="4636008" y="2807208"/>
-            <a:ext cx="2926080" cy="1092607"/>
+            <a:ext cx="2926080" cy="892552"/>
           </a:xfrm>
           <a:prstGeom prst="rect">
             <a:avLst/>
@@ -13696,26 +13696,113 @@
           <a:p>
             <a:pPr algn="l"/>
             <a:r>
+              <a:rPr lang="en-US" sz="1300" b="0" dirty="0" err="1">
+                <a:solidFill>
+                  <a:srgbClr val="5C6B7A"/>
+                </a:solidFill>
+                <a:latin typeface="Aptos"/>
+              </a:rPr>
+              <a:t>Sistem</a:t>
+            </a:r>
+            <a:r>
               <a:rPr lang="en-US" sz="1300" b="0" dirty="0">
                 <a:solidFill>
                   <a:srgbClr val="5C6B7A"/>
                 </a:solidFill>
                 <a:latin typeface="Aptos"/>
               </a:rPr>
-              <a:t>SISTEM PEMANTAUAN HOTSPOT MODIS DAN </a:t>
+              <a:t> </a:t>
+            </a:r>
+            <a:r>
+              <a:rPr lang="en-US" sz="1300" b="0" dirty="0" err="1">
+                <a:solidFill>
+                  <a:srgbClr val="5C6B7A"/>
+                </a:solidFill>
+                <a:latin typeface="Aptos"/>
+              </a:rPr>
+              <a:t>Pemantauan</a:t>
+            </a:r>
+            <a:r>
+              <a:rPr lang="en-US" sz="1300" b="0" dirty="0">
+                <a:solidFill>
+                  <a:srgbClr val="5C6B7A"/>
+                </a:solidFill>
+                <a:latin typeface="Aptos"/>
+              </a:rPr>
+              <a:t> Hotspot Modis Dan </a:t>
             </a:r>
           </a:p>
           <a:p>
             <a:pPr algn="l"/>
             <a:r>
+              <a:rPr lang="en-US" sz="1300" b="0" dirty="0" err="1">
+                <a:solidFill>
+                  <a:srgbClr val="5C6B7A"/>
+                </a:solidFill>
+                <a:latin typeface="Aptos"/>
+              </a:rPr>
+              <a:t>Estimasi</a:t>
+            </a:r>
+            <a:r>
               <a:rPr lang="en-US" sz="1300" b="0" dirty="0">
                 <a:solidFill>
                   <a:srgbClr val="5C6B7A"/>
                 </a:solidFill>
                 <a:latin typeface="Aptos"/>
               </a:rPr>
-              <a:t>ESTIMASI VOLUME LAVA PADA GUNUNG IBU DAN GUNUNG LEWOTOLOK</a:t>
-            </a:r>
+              <a:t> Volume Lava Pada </a:t>
+            </a:r>
+            <a:r>
+              <a:rPr lang="en-US" sz="1300" b="0" dirty="0" err="1">
+                <a:solidFill>
+                  <a:srgbClr val="5C6B7A"/>
+                </a:solidFill>
+                <a:latin typeface="Aptos"/>
+              </a:rPr>
+              <a:t>Gunung</a:t>
+            </a:r>
+            <a:r>
+              <a:rPr lang="en-US" sz="1300" b="0" dirty="0">
+                <a:solidFill>
+                  <a:srgbClr val="5C6B7A"/>
+                </a:solidFill>
+                <a:latin typeface="Aptos"/>
+              </a:rPr>
+              <a:t> Ibu Dan </a:t>
+            </a:r>
+            <a:r>
+              <a:rPr lang="en-US" sz="1300" b="0" dirty="0" err="1">
+                <a:solidFill>
+                  <a:srgbClr val="5C6B7A"/>
+                </a:solidFill>
+                <a:latin typeface="Aptos"/>
+              </a:rPr>
+              <a:t>Gunung</a:t>
+            </a:r>
+            <a:r>
+              <a:rPr lang="en-US" sz="1300" b="0" dirty="0">
+                <a:solidFill>
+                  <a:srgbClr val="5C6B7A"/>
+                </a:solidFill>
+                <a:latin typeface="Aptos"/>
+              </a:rPr>
+              <a:t> </a:t>
+            </a:r>
+            <a:r>
+              <a:rPr lang="en-US" sz="1300" b="0" dirty="0" err="1">
+                <a:solidFill>
+                  <a:srgbClr val="5C6B7A"/>
+                </a:solidFill>
+                <a:latin typeface="Aptos"/>
+              </a:rPr>
+              <a:t>Lewotolok</a:t>
+            </a:r>
+            <a:endParaRPr lang="en-US" sz="1300" b="0" dirty="0">
+              <a:solidFill>
+                <a:srgbClr val="5C6B7A"/>
+              </a:solidFill>
+              <a:latin typeface="Aptos"/>
+            </a:endParaRPr>
           </a:p>
         </p:txBody>
       </p:sp>
